--- a/Section 504/t2-lesson2-bellwork-504-ANSWER-KEY.pptx
+++ b/Section 504/t2-lesson2-bellwork-504-ANSWER-KEY.pptx
@@ -987,6 +987,40 @@
           </a:p>
         </p:txBody>
       </p:sp>
+      <p:sp>
+        <p:nvSpPr>
+          <p:cNvPr id="8" name="Slide Number 8"/>
+          <p:cNvSpPr txBox="1"/>
+          <p:nvPr/>
+        </p:nvSpPr>
+        <p:spPr>
+          <a:xfrm>
+            <a:off x="11277295" y="6611112"/>
+            <a:ext cx="685800" cy="201168"/>
+          </a:xfrm>
+          <a:prstGeom prst="rect">
+            <a:avLst/>
+          </a:prstGeom>
+          <a:noFill/>
+        </p:spPr>
+        <p:txBody>
+          <a:bodyPr wrap="none" lIns="0" tIns="0" rIns="0" bIns="0" anchor="b">
+            <a:noAutofit/>
+          </a:bodyPr>
+          <a:lstStyle/>
+          <a:p>
+            <a:pPr algn="r"/>
+            <a:fld id="{5C1A6E0B-3B1F-4D5E-9C7A-2F4B8D6E1A90}" type="slidenum">
+              <a:rPr lang="en-US" sz="1200" dirty="0">
+                <a:solidFill>
+                  <a:srgbClr val="5F6272"/>
+                </a:solidFill>
+              </a:rPr>
+              <a:t>1</a:t>
+            </a:fld>
+          </a:p>
+        </p:txBody>
+      </p:sp>
     </p:spTree>
   </p:cSld>
   <p:clrMapOvr>
@@ -1610,6 +1644,40 @@
           </a:p>
         </p:txBody>
       </p:sp>
+      <p:sp>
+        <p:nvSpPr>
+          <p:cNvPr id="16" name="Slide Number 16"/>
+          <p:cNvSpPr txBox="1"/>
+          <p:nvPr/>
+        </p:nvSpPr>
+        <p:spPr>
+          <a:xfrm>
+            <a:off x="11277295" y="6611112"/>
+            <a:ext cx="685800" cy="201168"/>
+          </a:xfrm>
+          <a:prstGeom prst="rect">
+            <a:avLst/>
+          </a:prstGeom>
+          <a:noFill/>
+        </p:spPr>
+        <p:txBody>
+          <a:bodyPr wrap="none" lIns="0" tIns="0" rIns="0" bIns="0" anchor="b">
+            <a:noAutofit/>
+          </a:bodyPr>
+          <a:lstStyle/>
+          <a:p>
+            <a:pPr algn="r"/>
+            <a:fld id="{5C1A6E0B-3B1F-4D5E-9C7A-2F4B8D6E1A90}" type="slidenum">
+              <a:rPr lang="en-US" sz="1200" dirty="0">
+                <a:solidFill>
+                  <a:srgbClr val="5F6272"/>
+                </a:solidFill>
+              </a:rPr>
+              <a:t>2</a:t>
+            </a:fld>
+          </a:p>
+        </p:txBody>
+      </p:sp>
     </p:spTree>
   </p:cSld>
   <p:clrMapOvr>
@@ -2243,6 +2311,40 @@
           </a:p>
         </p:txBody>
       </p:sp>
+      <p:sp>
+        <p:nvSpPr>
+          <p:cNvPr id="16" name="Slide Number 16"/>
+          <p:cNvSpPr txBox="1"/>
+          <p:nvPr/>
+        </p:nvSpPr>
+        <p:spPr>
+          <a:xfrm>
+            <a:off x="11277295" y="6611112"/>
+            <a:ext cx="685800" cy="201168"/>
+          </a:xfrm>
+          <a:prstGeom prst="rect">
+            <a:avLst/>
+          </a:prstGeom>
+          <a:noFill/>
+        </p:spPr>
+        <p:txBody>
+          <a:bodyPr wrap="none" lIns="0" tIns="0" rIns="0" bIns="0" anchor="b">
+            <a:noAutofit/>
+          </a:bodyPr>
+          <a:lstStyle/>
+          <a:p>
+            <a:pPr algn="r"/>
+            <a:fld id="{5C1A6E0B-3B1F-4D5E-9C7A-2F4B8D6E1A90}" type="slidenum">
+              <a:rPr lang="en-US" sz="1200" dirty="0">
+                <a:solidFill>
+                  <a:srgbClr val="5F6272"/>
+                </a:solidFill>
+              </a:rPr>
+              <a:t>3</a:t>
+            </a:fld>
+          </a:p>
+        </p:txBody>
+      </p:sp>
     </p:spTree>
   </p:cSld>
   <p:clrMapOvr>
@@ -2876,6 +2978,40 @@
           </a:p>
         </p:txBody>
       </p:sp>
+      <p:sp>
+        <p:nvSpPr>
+          <p:cNvPr id="16" name="Slide Number 16"/>
+          <p:cNvSpPr txBox="1"/>
+          <p:nvPr/>
+        </p:nvSpPr>
+        <p:spPr>
+          <a:xfrm>
+            <a:off x="11277295" y="6611112"/>
+            <a:ext cx="685800" cy="201168"/>
+          </a:xfrm>
+          <a:prstGeom prst="rect">
+            <a:avLst/>
+          </a:prstGeom>
+          <a:noFill/>
+        </p:spPr>
+        <p:txBody>
+          <a:bodyPr wrap="none" lIns="0" tIns="0" rIns="0" bIns="0" anchor="b">
+            <a:noAutofit/>
+          </a:bodyPr>
+          <a:lstStyle/>
+          <a:p>
+            <a:pPr algn="r"/>
+            <a:fld id="{5C1A6E0B-3B1F-4D5E-9C7A-2F4B8D6E1A90}" type="slidenum">
+              <a:rPr lang="en-US" sz="1200" dirty="0">
+                <a:solidFill>
+                  <a:srgbClr val="5F6272"/>
+                </a:solidFill>
+              </a:rPr>
+              <a:t>4</a:t>
+            </a:fld>
+          </a:p>
+        </p:txBody>
+      </p:sp>
     </p:spTree>
   </p:cSld>
   <p:clrMapOvr>
@@ -3506,6 +3642,40 @@
               <a:t xml:space="preserve">Topic 2 Lesson 2 Bell Work · Section 504 Version · Answer Key (teacher copy)</a:t>
             </a:r>
             <a:endParaRPr lang="en-US" sz="1125" dirty="0"/>
+          </a:p>
+        </p:txBody>
+      </p:sp>
+      <p:sp>
+        <p:nvSpPr>
+          <p:cNvPr id="16" name="Slide Number 16"/>
+          <p:cNvSpPr txBox="1"/>
+          <p:nvPr/>
+        </p:nvSpPr>
+        <p:spPr>
+          <a:xfrm>
+            <a:off x="11277295" y="6611112"/>
+            <a:ext cx="685800" cy="201168"/>
+          </a:xfrm>
+          <a:prstGeom prst="rect">
+            <a:avLst/>
+          </a:prstGeom>
+          <a:noFill/>
+        </p:spPr>
+        <p:txBody>
+          <a:bodyPr wrap="none" lIns="0" tIns="0" rIns="0" bIns="0" anchor="b">
+            <a:noAutofit/>
+          </a:bodyPr>
+          <a:lstStyle/>
+          <a:p>
+            <a:pPr algn="r"/>
+            <a:fld id="{5C1A6E0B-3B1F-4D5E-9C7A-2F4B8D6E1A90}" type="slidenum">
+              <a:rPr lang="en-US" sz="1200" dirty="0">
+                <a:solidFill>
+                  <a:srgbClr val="5F6272"/>
+                </a:solidFill>
+              </a:rPr>
+              <a:t>5</a:t>
+            </a:fld>
           </a:p>
         </p:txBody>
       </p:sp>

--- a/Section 504/t2-lesson2-bellwork-504-ANSWER-KEY.pptx
+++ b/Section 504/t2-lesson2-bellwork-504-ANSWER-KEY.pptx
@@ -2094,7 +2094,7 @@
         <p:spPr>
           <a:xfrm>
             <a:off x="685800" y="2731770"/>
-            <a:ext cx="2164019" cy="1024128"/>
+            <a:ext cx="2164019" cy="1298448"/>
           </a:xfrm>
           <a:prstGeom prst="rect">
             <a:avLst/>
@@ -2133,7 +2133,7 @@
                 <a:latin typeface="Segoe UI"/>
                 <a:cs typeface="Segoe UI"/>
               </a:rPr>
-              <a:t xml:space="preserve"> · SE p. 288</a:t>
+              <a:t xml:space="preserve"> · SE p. 280</a:t>
             </a:r>
             <a:endParaRPr lang="en-US" sz="1800" dirty="0"/>
           </a:p>
@@ -2148,7 +2148,7 @@
         <p:spPr>
           <a:xfrm>
             <a:off x="2849819" y="2731770"/>
-            <a:ext cx="4328038" cy="1024128"/>
+            <a:ext cx="4328038" cy="1298448"/>
           </a:xfrm>
           <a:prstGeom prst="rect">
             <a:avLst/>
@@ -2177,7 +2177,7 @@
                 <a:latin typeface="Segoe UI"/>
                 <a:cs typeface="Segoe UI"/>
               </a:rPr>
-              <a:t xml:space="preserve">Is h(x) = −⅔x + 5 increasing or decreasing?</a:t>
+              <a:t xml:space="preserve">Let f(x) = x and g(x) = 2f(x) − 3. Which is g(x) in slope-intercept form?</a:t>
             </a:r>
             <a:endParaRPr lang="en-US" sz="1800" dirty="0"/>
           </a:p>
@@ -2192,7 +2192,7 @@
         <p:spPr>
           <a:xfrm>
             <a:off x="7177857" y="2731770"/>
-            <a:ext cx="4328038" cy="1024128"/>
+            <a:ext cx="4328038" cy="1298448"/>
           </a:xfrm>
           <a:prstGeom prst="rect">
             <a:avLst/>
@@ -2221,7 +2221,7 @@
                 <a:latin typeface="Segoe UI"/>
                 <a:cs typeface="Segoe UI"/>
               </a:rPr>
-              <a:t xml:space="preserve">Decreasing</a:t>
+              <a:t xml:space="preserve">g(x) = 2x − 3</a:t>
             </a:r>
             <a:br>
               <a:rPr lang="en-US" sz="1800" dirty="0">
@@ -2240,7 +2240,7 @@
                 <a:latin typeface="Segoe UI"/>
                 <a:cs typeface="Segoe UI"/>
               </a:rPr>
-              <a:t xml:space="preserve">The slope −⅔ is negative, so the line falls from left to right.</a:t>
+              <a:t xml:space="preserve">Replace f(x) with x: g(x) = 2x − 3, a vertical dilation by 2 and a translation down 3.</a:t>
             </a:r>
             <a:endParaRPr lang="en-US" sz="1800" dirty="0"/>
           </a:p>
@@ -2254,7 +2254,7 @@
         </p:nvCxnSpPr>
         <p:spPr>
           <a:xfrm>
-            <a:off x="685800" y="3755898"/>
+            <a:off x="685800" y="4030218"/>
             <a:ext cx="10820095" cy="0"/>
           </a:xfrm>
           <a:prstGeom prst="line">
@@ -3467,7 +3467,7 @@
                 <a:latin typeface="Segoe UI"/>
                 <a:cs typeface="Segoe UI"/>
               </a:rPr>
-              <a:t xml:space="preserve"> · SE p. 295</a:t>
+              <a:t xml:space="preserve"> · SE p. 293</a:t>
             </a:r>
             <a:endParaRPr lang="en-US" sz="1800" dirty="0"/>
           </a:p>
@@ -3511,7 +3511,7 @@
                 <a:latin typeface="Segoe UI"/>
                 <a:cs typeface="Segoe UI"/>
               </a:rPr>
-              <a:t xml:space="preserve">For f(x) = x, is the graph of f(2x) the same as the graph of 2f(x)?</a:t>
+              <a:t xml:space="preserve">The graph of f(x) = 3x is translated right 2 units. Which function represents the new graph?</a:t>
             </a:r>
             <a:endParaRPr lang="en-US" sz="1800" dirty="0"/>
           </a:p>
@@ -3555,7 +3555,7 @@
                 <a:latin typeface="Segoe UI"/>
                 <a:cs typeface="Segoe UI"/>
               </a:rPr>
-              <a:t xml:space="preserve">Yes, both are y = 2x</a:t>
+              <a:t xml:space="preserve">g(x) = 3x − 6</a:t>
             </a:r>
             <a:br>
               <a:rPr lang="en-US" sz="1800" dirty="0">
@@ -3574,7 +3574,7 @@
                 <a:latin typeface="Segoe UI"/>
                 <a:cs typeface="Segoe UI"/>
               </a:rPr>
-              <a:t xml:space="preserve">f(2x) = 2x and 2f(x) = 2x. For the parent function they match.</a:t>
+              <a:t xml:space="preserve">Right 2 means f(x − 2) = 3(x − 2). Distribute: 3x − 6.</a:t>
             </a:r>
             <a:endParaRPr lang="en-US" sz="1800" dirty="0"/>
           </a:p>
